--- a/Servlets/session tracking.pptx
+++ b/Servlets/session tracking.pptx
@@ -21,51 +21,6 @@
     <p:sldId id="341" r:id="rId15"/>
     <p:sldId id="342" r:id="rId16"/>
     <p:sldId id="343" r:id="rId17"/>
-    <p:sldId id="344" r:id="rId18"/>
-    <p:sldId id="345" r:id="rId19"/>
-    <p:sldId id="346" r:id="rId20"/>
-    <p:sldId id="347" r:id="rId21"/>
-    <p:sldId id="348" r:id="rId22"/>
-    <p:sldId id="349" r:id="rId23"/>
-    <p:sldId id="350" r:id="rId24"/>
-    <p:sldId id="351" r:id="rId25"/>
-    <p:sldId id="352" r:id="rId26"/>
-    <p:sldId id="353" r:id="rId27"/>
-    <p:sldId id="354" r:id="rId28"/>
-    <p:sldId id="355" r:id="rId29"/>
-    <p:sldId id="356" r:id="rId30"/>
-    <p:sldId id="357" r:id="rId31"/>
-    <p:sldId id="358" r:id="rId32"/>
-    <p:sldId id="359" r:id="rId33"/>
-    <p:sldId id="360" r:id="rId34"/>
-    <p:sldId id="361" r:id="rId35"/>
-    <p:sldId id="362" r:id="rId36"/>
-    <p:sldId id="363" r:id="rId37"/>
-    <p:sldId id="281" r:id="rId38"/>
-    <p:sldId id="282" r:id="rId39"/>
-    <p:sldId id="283" r:id="rId40"/>
-    <p:sldId id="284" r:id="rId41"/>
-    <p:sldId id="285" r:id="rId42"/>
-    <p:sldId id="286" r:id="rId43"/>
-    <p:sldId id="287" r:id="rId44"/>
-    <p:sldId id="288" r:id="rId45"/>
-    <p:sldId id="289" r:id="rId46"/>
-    <p:sldId id="290" r:id="rId47"/>
-    <p:sldId id="291" r:id="rId48"/>
-    <p:sldId id="292" r:id="rId49"/>
-    <p:sldId id="293" r:id="rId50"/>
-    <p:sldId id="294" r:id="rId51"/>
-    <p:sldId id="295" r:id="rId52"/>
-    <p:sldId id="296" r:id="rId53"/>
-    <p:sldId id="297" r:id="rId54"/>
-    <p:sldId id="298" r:id="rId55"/>
-    <p:sldId id="299" r:id="rId56"/>
-    <p:sldId id="300" r:id="rId57"/>
-    <p:sldId id="301" r:id="rId58"/>
-    <p:sldId id="302" r:id="rId59"/>
-    <p:sldId id="303" r:id="rId60"/>
-    <p:sldId id="304" r:id="rId61"/>
-    <p:sldId id="305" r:id="rId62"/>
   </p:sldIdLst>
   <p:sldSz cx="9144000" cy="6858000" type="screen4x3"/>
   <p:notesSz cx="6858000" cy="9144000"/>
@@ -166,7 +121,7 @@
   </p:defaultTextStyle>
   <p:extLst>
     <p:ext uri="{EFAFB233-063F-42B5-8137-9DF3F51BA10A}">
-      <p15:sldGuideLst xmlns:p15="http://schemas.microsoft.com/office/powerpoint/2012/main" xmlns="">
+      <p15:sldGuideLst xmlns:p15="http://schemas.microsoft.com/office/powerpoint/2012/main">
         <p15:guide id="1" orient="horz" pos="2160">
           <p15:clr>
             <a:srgbClr val="A4A3A4"/>
@@ -363,7 +318,7 @@
             <a:fld id="{1D8BD707-D9CF-40AE-B4C6-C98DA3205C09}" type="datetimeFigureOut">
               <a:rPr lang="en-US" smtClean="0"/>
               <a:pPr/>
-              <a:t>11/2/2022</a:t>
+              <a:t>6/15/2025</a:t>
             </a:fld>
             <a:endParaRPr lang="en-US"/>
           </a:p>
@@ -528,7 +483,7 @@
             <a:fld id="{1D8BD707-D9CF-40AE-B4C6-C98DA3205C09}" type="datetimeFigureOut">
               <a:rPr lang="en-US" smtClean="0"/>
               <a:pPr/>
-              <a:t>11/2/2022</a:t>
+              <a:t>6/15/2025</a:t>
             </a:fld>
             <a:endParaRPr lang="en-US"/>
           </a:p>
@@ -703,7 +658,7 @@
             <a:fld id="{1D8BD707-D9CF-40AE-B4C6-C98DA3205C09}" type="datetimeFigureOut">
               <a:rPr lang="en-US" smtClean="0"/>
               <a:pPr/>
-              <a:t>11/2/2022</a:t>
+              <a:t>6/15/2025</a:t>
             </a:fld>
             <a:endParaRPr lang="en-US"/>
           </a:p>
@@ -868,7 +823,7 @@
             <a:fld id="{1D8BD707-D9CF-40AE-B4C6-C98DA3205C09}" type="datetimeFigureOut">
               <a:rPr lang="en-US" smtClean="0"/>
               <a:pPr/>
-              <a:t>11/2/2022</a:t>
+              <a:t>6/15/2025</a:t>
             </a:fld>
             <a:endParaRPr lang="en-US"/>
           </a:p>
@@ -1110,7 +1065,7 @@
             <a:fld id="{1D8BD707-D9CF-40AE-B4C6-C98DA3205C09}" type="datetimeFigureOut">
               <a:rPr lang="en-US" smtClean="0"/>
               <a:pPr/>
-              <a:t>11/2/2022</a:t>
+              <a:t>6/15/2025</a:t>
             </a:fld>
             <a:endParaRPr lang="en-US"/>
           </a:p>
@@ -1392,7 +1347,7 @@
             <a:fld id="{1D8BD707-D9CF-40AE-B4C6-C98DA3205C09}" type="datetimeFigureOut">
               <a:rPr lang="en-US" smtClean="0"/>
               <a:pPr/>
-              <a:t>11/2/2022</a:t>
+              <a:t>6/15/2025</a:t>
             </a:fld>
             <a:endParaRPr lang="en-US"/>
           </a:p>
@@ -1808,7 +1763,7 @@
             <a:fld id="{1D8BD707-D9CF-40AE-B4C6-C98DA3205C09}" type="datetimeFigureOut">
               <a:rPr lang="en-US" smtClean="0"/>
               <a:pPr/>
-              <a:t>11/2/2022</a:t>
+              <a:t>6/15/2025</a:t>
             </a:fld>
             <a:endParaRPr lang="en-US"/>
           </a:p>
@@ -1922,7 +1877,7 @@
             <a:fld id="{1D8BD707-D9CF-40AE-B4C6-C98DA3205C09}" type="datetimeFigureOut">
               <a:rPr lang="en-US" smtClean="0"/>
               <a:pPr/>
-              <a:t>11/2/2022</a:t>
+              <a:t>6/15/2025</a:t>
             </a:fld>
             <a:endParaRPr lang="en-US"/>
           </a:p>
@@ -2014,7 +1969,7 @@
             <a:fld id="{1D8BD707-D9CF-40AE-B4C6-C98DA3205C09}" type="datetimeFigureOut">
               <a:rPr lang="en-US" smtClean="0"/>
               <a:pPr/>
-              <a:t>11/2/2022</a:t>
+              <a:t>6/15/2025</a:t>
             </a:fld>
             <a:endParaRPr lang="en-US"/>
           </a:p>
@@ -2286,7 +2241,7 @@
             <a:fld id="{1D8BD707-D9CF-40AE-B4C6-C98DA3205C09}" type="datetimeFigureOut">
               <a:rPr lang="en-US" smtClean="0"/>
               <a:pPr/>
-              <a:t>11/2/2022</a:t>
+              <a:t>6/15/2025</a:t>
             </a:fld>
             <a:endParaRPr lang="en-US"/>
           </a:p>
@@ -2535,7 +2490,7 @@
             <a:fld id="{1D8BD707-D9CF-40AE-B4C6-C98DA3205C09}" type="datetimeFigureOut">
               <a:rPr lang="en-US" smtClean="0"/>
               <a:pPr/>
-              <a:t>11/2/2022</a:t>
+              <a:t>6/15/2025</a:t>
             </a:fld>
             <a:endParaRPr lang="en-US"/>
           </a:p>
@@ -2743,7 +2698,7 @@
             <a:fld id="{1D8BD707-D9CF-40AE-B4C6-C98DA3205C09}" type="datetimeFigureOut">
               <a:rPr lang="en-US" smtClean="0"/>
               <a:pPr/>
-              <a:t>11/2/2022</a:t>
+              <a:t>6/15/2025</a:t>
             </a:fld>
             <a:endParaRPr lang="en-US"/>
           </a:p>
@@ -3406,7 +3361,7 @@
           <a:lstStyle/>
           <a:p>
             <a:r>
-              <a:rPr lang="en-IN" sz="3000" b="1" dirty="0" smtClean="0"/>
+              <a:rPr lang="en-IN" sz="3000" b="1" dirty="0"/>
               <a:t>b. Cookies Session Tracking Mechanism</a:t>
             </a:r>
           </a:p>
@@ -3434,15 +3389,15 @@
           <a:lstStyle/>
           <a:p>
             <a:r>
-              <a:rPr lang="en-IN" sz="3300" dirty="0" smtClean="0"/>
+              <a:rPr lang="en-IN" sz="3300" dirty="0"/>
               <a:t>we will  </a:t>
             </a:r>
             <a:r>
-              <a:rPr lang="en-US" sz="3300" dirty="0" smtClean="0"/>
+              <a:rPr lang="en-US" sz="3300" dirty="0"/>
               <a:t>maintain client previous request details at the time of processing later request at server side  using </a:t>
             </a:r>
             <a:r>
-              <a:rPr lang="en-IN" sz="3300" dirty="0" smtClean="0"/>
+              <a:rPr lang="en-IN" sz="3300" dirty="0"/>
               <a:t>Cookies </a:t>
             </a:r>
           </a:p>
@@ -3470,18 +3425,17 @@
           <a:lstStyle/>
           <a:p>
             <a:r>
-              <a:rPr lang="en-US" sz="3300" dirty="0" smtClean="0"/>
+              <a:rPr lang="en-US" sz="3300" dirty="0"/>
               <a:t>A </a:t>
             </a:r>
             <a:r>
-              <a:rPr lang="en-US" sz="3300" b="1" dirty="0" smtClean="0"/>
+              <a:rPr lang="en-US" sz="3300" b="1" dirty="0"/>
               <a:t>cookie</a:t>
             </a:r>
             <a:r>
-              <a:rPr lang="en-US" sz="3300" dirty="0" smtClean="0"/>
+              <a:rPr lang="en-US" sz="3300" dirty="0"/>
               <a:t> is a small piece of information that is persisted between the multiple client requests.</a:t>
             </a:r>
-            <a:endParaRPr lang="en-US" sz="3300" dirty="0"/>
           </a:p>
         </p:txBody>
       </p:sp>
@@ -3590,48 +3544,47 @@
           <a:lstStyle/>
           <a:p>
             <a:r>
-              <a:rPr lang="en-US" sz="3300" b="1" dirty="0" smtClean="0"/>
+              <a:rPr lang="en-US" sz="3300" b="1" dirty="0"/>
               <a:t>Advantages</a:t>
             </a:r>
             <a:r>
-              <a:rPr lang="en-US" sz="3300" dirty="0" smtClean="0"/>
+              <a:rPr lang="en-US" sz="3300" dirty="0"/>
               <a:t>:</a:t>
             </a:r>
           </a:p>
           <a:p>
             <a:r>
-              <a:rPr lang="en-US" sz="3300" dirty="0" smtClean="0"/>
+              <a:rPr lang="en-US" sz="3300" dirty="0"/>
               <a:t>  The data is maintained at client side so performance is  increased.</a:t>
             </a:r>
           </a:p>
           <a:p>
-            <a:endParaRPr lang="en-US" sz="3300" dirty="0" smtClean="0"/>
-          </a:p>
-          <a:p>
-            <a:r>
-              <a:rPr lang="en-US" sz="3300" b="1" dirty="0" smtClean="0"/>
+            <a:endParaRPr lang="en-US" sz="3300" dirty="0"/>
+          </a:p>
+          <a:p>
+            <a:r>
+              <a:rPr lang="en-US" sz="3300" b="1" dirty="0"/>
               <a:t>limitations</a:t>
             </a:r>
             <a:r>
-              <a:rPr lang="en-US" sz="3300" dirty="0" smtClean="0"/>
+              <a:rPr lang="en-US" sz="3300" dirty="0"/>
               <a:t>:</a:t>
             </a:r>
           </a:p>
           <a:p>
-            <a:endParaRPr lang="en-US" sz="3300" dirty="0" smtClean="0"/>
-          </a:p>
-          <a:p>
-            <a:r>
-              <a:rPr lang="en-US" sz="3300" dirty="0" smtClean="0"/>
+            <a:endParaRPr lang="en-US" sz="3300" dirty="0"/>
+          </a:p>
+          <a:p>
+            <a:r>
+              <a:rPr lang="en-US" sz="3300" dirty="0"/>
               <a:t>The data is maintained at client side so it is not secure.</a:t>
             </a:r>
           </a:p>
           <a:p>
             <a:r>
-              <a:rPr lang="en-US" sz="3300" dirty="0" smtClean="0"/>
+              <a:rPr lang="en-US" sz="3300" dirty="0"/>
               <a:t>If cookies are disabled this mechanism will not work</a:t>
             </a:r>
-            <a:endParaRPr lang="en-US" sz="3300" dirty="0"/>
           </a:p>
         </p:txBody>
       </p:sp>
@@ -3682,88 +3635,12 @@
           <a:lstStyle/>
           <a:p>
             <a:r>
-              <a:rPr lang="en-US" dirty="0" smtClean="0"/>
+              <a:rPr lang="en-US" dirty="0"/>
               <a:t>https://www.geeksforgeeks.org/the-httpsession-interface-in-servlet/</a:t>
             </a:r>
-            <a:endParaRPr lang="en-US" dirty="0"/>
-          </a:p>
-        </p:txBody>
-      </p:sp>
-    </p:spTree>
-  </p:cSld>
-  <p:clrMapOvr>
-    <a:masterClrMapping/>
-  </p:clrMapOvr>
-</p:sld>
-</file>
-
-<file path=ppt/slides/slide17.xml><?xml version="1.0" encoding="utf-8"?>
-<p:sld xmlns:a="http://schemas.openxmlformats.org/drawingml/2006/main" xmlns:r="http://schemas.openxmlformats.org/officeDocument/2006/relationships" xmlns:p="http://schemas.openxmlformats.org/presentationml/2006/main">
-  <p:cSld>
-    <p:spTree>
-      <p:nvGrpSpPr>
-        <p:cNvPr id="1" name=""/>
-        <p:cNvGrpSpPr/>
-        <p:nvPr/>
-      </p:nvGrpSpPr>
-      <p:grpSpPr>
-        <a:xfrm>
-          <a:off x="0" y="0"/>
-          <a:ext cx="0" cy="0"/>
-          <a:chOff x="0" y="0"/>
-          <a:chExt cx="0" cy="0"/>
-        </a:xfrm>
-      </p:grpSpPr>
-    </p:spTree>
-  </p:cSld>
-  <p:clrMapOvr>
-    <a:masterClrMapping/>
-  </p:clrMapOvr>
-</p:sld>
-</file>
-
-<file path=ppt/slides/slide18.xml><?xml version="1.0" encoding="utf-8"?>
-<p:sld xmlns:a="http://schemas.openxmlformats.org/drawingml/2006/main" xmlns:r="http://schemas.openxmlformats.org/officeDocument/2006/relationships" xmlns:p="http://schemas.openxmlformats.org/presentationml/2006/main">
-  <p:cSld>
-    <p:spTree>
-      <p:nvGrpSpPr>
-        <p:cNvPr id="1" name=""/>
-        <p:cNvGrpSpPr/>
-        <p:nvPr/>
-      </p:nvGrpSpPr>
-      <p:grpSpPr>
-        <a:xfrm>
-          <a:off x="0" y="0"/>
-          <a:ext cx="0" cy="0"/>
-          <a:chOff x="0" y="0"/>
-          <a:chExt cx="0" cy="0"/>
-        </a:xfrm>
-      </p:grpSpPr>
-    </p:spTree>
-  </p:cSld>
-  <p:clrMapOvr>
-    <a:masterClrMapping/>
-  </p:clrMapOvr>
-</p:sld>
-</file>
-
-<file path=ppt/slides/slide19.xml><?xml version="1.0" encoding="utf-8"?>
-<p:sld xmlns:a="http://schemas.openxmlformats.org/drawingml/2006/main" xmlns:r="http://schemas.openxmlformats.org/officeDocument/2006/relationships" xmlns:p="http://schemas.openxmlformats.org/presentationml/2006/main">
-  <p:cSld>
-    <p:spTree>
-      <p:nvGrpSpPr>
-        <p:cNvPr id="1" name=""/>
-        <p:cNvGrpSpPr/>
-        <p:nvPr/>
-      </p:nvGrpSpPr>
-      <p:grpSpPr>
-        <a:xfrm>
-          <a:off x="0" y="0"/>
-          <a:ext cx="0" cy="0"/>
-          <a:chOff x="0" y="0"/>
-          <a:chExt cx="0" cy="0"/>
-        </a:xfrm>
-      </p:grpSpPr>
+          </a:p>
+        </p:txBody>
+      </p:sp>
     </p:spTree>
   </p:cSld>
   <p:clrMapOvr>
@@ -3868,256 +3745,6 @@
 </p:sld>
 </file>
 
-<file path=ppt/slides/slide20.xml><?xml version="1.0" encoding="utf-8"?>
-<p:sld xmlns:a="http://schemas.openxmlformats.org/drawingml/2006/main" xmlns:r="http://schemas.openxmlformats.org/officeDocument/2006/relationships" xmlns:p="http://schemas.openxmlformats.org/presentationml/2006/main">
-  <p:cSld>
-    <p:spTree>
-      <p:nvGrpSpPr>
-        <p:cNvPr id="1" name=""/>
-        <p:cNvGrpSpPr/>
-        <p:nvPr/>
-      </p:nvGrpSpPr>
-      <p:grpSpPr>
-        <a:xfrm>
-          <a:off x="0" y="0"/>
-          <a:ext cx="0" cy="0"/>
-          <a:chOff x="0" y="0"/>
-          <a:chExt cx="0" cy="0"/>
-        </a:xfrm>
-      </p:grpSpPr>
-    </p:spTree>
-  </p:cSld>
-  <p:clrMapOvr>
-    <a:masterClrMapping/>
-  </p:clrMapOvr>
-</p:sld>
-</file>
-
-<file path=ppt/slides/slide21.xml><?xml version="1.0" encoding="utf-8"?>
-<p:sld xmlns:a="http://schemas.openxmlformats.org/drawingml/2006/main" xmlns:r="http://schemas.openxmlformats.org/officeDocument/2006/relationships" xmlns:p="http://schemas.openxmlformats.org/presentationml/2006/main">
-  <p:cSld>
-    <p:spTree>
-      <p:nvGrpSpPr>
-        <p:cNvPr id="1" name=""/>
-        <p:cNvGrpSpPr/>
-        <p:nvPr/>
-      </p:nvGrpSpPr>
-      <p:grpSpPr>
-        <a:xfrm>
-          <a:off x="0" y="0"/>
-          <a:ext cx="0" cy="0"/>
-          <a:chOff x="0" y="0"/>
-          <a:chExt cx="0" cy="0"/>
-        </a:xfrm>
-      </p:grpSpPr>
-    </p:spTree>
-  </p:cSld>
-  <p:clrMapOvr>
-    <a:masterClrMapping/>
-  </p:clrMapOvr>
-</p:sld>
-</file>
-
-<file path=ppt/slides/slide22.xml><?xml version="1.0" encoding="utf-8"?>
-<p:sld xmlns:a="http://schemas.openxmlformats.org/drawingml/2006/main" xmlns:r="http://schemas.openxmlformats.org/officeDocument/2006/relationships" xmlns:p="http://schemas.openxmlformats.org/presentationml/2006/main">
-  <p:cSld>
-    <p:spTree>
-      <p:nvGrpSpPr>
-        <p:cNvPr id="1" name=""/>
-        <p:cNvGrpSpPr/>
-        <p:nvPr/>
-      </p:nvGrpSpPr>
-      <p:grpSpPr>
-        <a:xfrm>
-          <a:off x="0" y="0"/>
-          <a:ext cx="0" cy="0"/>
-          <a:chOff x="0" y="0"/>
-          <a:chExt cx="0" cy="0"/>
-        </a:xfrm>
-      </p:grpSpPr>
-    </p:spTree>
-  </p:cSld>
-  <p:clrMapOvr>
-    <a:masterClrMapping/>
-  </p:clrMapOvr>
-</p:sld>
-</file>
-
-<file path=ppt/slides/slide23.xml><?xml version="1.0" encoding="utf-8"?>
-<p:sld xmlns:a="http://schemas.openxmlformats.org/drawingml/2006/main" xmlns:r="http://schemas.openxmlformats.org/officeDocument/2006/relationships" xmlns:p="http://schemas.openxmlformats.org/presentationml/2006/main">
-  <p:cSld>
-    <p:spTree>
-      <p:nvGrpSpPr>
-        <p:cNvPr id="1" name=""/>
-        <p:cNvGrpSpPr/>
-        <p:nvPr/>
-      </p:nvGrpSpPr>
-      <p:grpSpPr>
-        <a:xfrm>
-          <a:off x="0" y="0"/>
-          <a:ext cx="0" cy="0"/>
-          <a:chOff x="0" y="0"/>
-          <a:chExt cx="0" cy="0"/>
-        </a:xfrm>
-      </p:grpSpPr>
-    </p:spTree>
-  </p:cSld>
-  <p:clrMapOvr>
-    <a:masterClrMapping/>
-  </p:clrMapOvr>
-</p:sld>
-</file>
-
-<file path=ppt/slides/slide24.xml><?xml version="1.0" encoding="utf-8"?>
-<p:sld xmlns:a="http://schemas.openxmlformats.org/drawingml/2006/main" xmlns:r="http://schemas.openxmlformats.org/officeDocument/2006/relationships" xmlns:p="http://schemas.openxmlformats.org/presentationml/2006/main">
-  <p:cSld>
-    <p:spTree>
-      <p:nvGrpSpPr>
-        <p:cNvPr id="1" name=""/>
-        <p:cNvGrpSpPr/>
-        <p:nvPr/>
-      </p:nvGrpSpPr>
-      <p:grpSpPr>
-        <a:xfrm>
-          <a:off x="0" y="0"/>
-          <a:ext cx="0" cy="0"/>
-          <a:chOff x="0" y="0"/>
-          <a:chExt cx="0" cy="0"/>
-        </a:xfrm>
-      </p:grpSpPr>
-    </p:spTree>
-  </p:cSld>
-  <p:clrMapOvr>
-    <a:masterClrMapping/>
-  </p:clrMapOvr>
-</p:sld>
-</file>
-
-<file path=ppt/slides/slide25.xml><?xml version="1.0" encoding="utf-8"?>
-<p:sld xmlns:a="http://schemas.openxmlformats.org/drawingml/2006/main" xmlns:r="http://schemas.openxmlformats.org/officeDocument/2006/relationships" xmlns:p="http://schemas.openxmlformats.org/presentationml/2006/main">
-  <p:cSld>
-    <p:spTree>
-      <p:nvGrpSpPr>
-        <p:cNvPr id="1" name=""/>
-        <p:cNvGrpSpPr/>
-        <p:nvPr/>
-      </p:nvGrpSpPr>
-      <p:grpSpPr>
-        <a:xfrm>
-          <a:off x="0" y="0"/>
-          <a:ext cx="0" cy="0"/>
-          <a:chOff x="0" y="0"/>
-          <a:chExt cx="0" cy="0"/>
-        </a:xfrm>
-      </p:grpSpPr>
-    </p:spTree>
-  </p:cSld>
-  <p:clrMapOvr>
-    <a:masterClrMapping/>
-  </p:clrMapOvr>
-</p:sld>
-</file>
-
-<file path=ppt/slides/slide26.xml><?xml version="1.0" encoding="utf-8"?>
-<p:sld xmlns:a="http://schemas.openxmlformats.org/drawingml/2006/main" xmlns:r="http://schemas.openxmlformats.org/officeDocument/2006/relationships" xmlns:p="http://schemas.openxmlformats.org/presentationml/2006/main">
-  <p:cSld>
-    <p:spTree>
-      <p:nvGrpSpPr>
-        <p:cNvPr id="1" name=""/>
-        <p:cNvGrpSpPr/>
-        <p:nvPr/>
-      </p:nvGrpSpPr>
-      <p:grpSpPr>
-        <a:xfrm>
-          <a:off x="0" y="0"/>
-          <a:ext cx="0" cy="0"/>
-          <a:chOff x="0" y="0"/>
-          <a:chExt cx="0" cy="0"/>
-        </a:xfrm>
-      </p:grpSpPr>
-    </p:spTree>
-  </p:cSld>
-  <p:clrMapOvr>
-    <a:masterClrMapping/>
-  </p:clrMapOvr>
-</p:sld>
-</file>
-
-<file path=ppt/slides/slide27.xml><?xml version="1.0" encoding="utf-8"?>
-<p:sld xmlns:a="http://schemas.openxmlformats.org/drawingml/2006/main" xmlns:r="http://schemas.openxmlformats.org/officeDocument/2006/relationships" xmlns:p="http://schemas.openxmlformats.org/presentationml/2006/main">
-  <p:cSld>
-    <p:spTree>
-      <p:nvGrpSpPr>
-        <p:cNvPr id="1" name=""/>
-        <p:cNvGrpSpPr/>
-        <p:nvPr/>
-      </p:nvGrpSpPr>
-      <p:grpSpPr>
-        <a:xfrm>
-          <a:off x="0" y="0"/>
-          <a:ext cx="0" cy="0"/>
-          <a:chOff x="0" y="0"/>
-          <a:chExt cx="0" cy="0"/>
-        </a:xfrm>
-      </p:grpSpPr>
-    </p:spTree>
-  </p:cSld>
-  <p:clrMapOvr>
-    <a:masterClrMapping/>
-  </p:clrMapOvr>
-</p:sld>
-</file>
-
-<file path=ppt/slides/slide28.xml><?xml version="1.0" encoding="utf-8"?>
-<p:sld xmlns:a="http://schemas.openxmlformats.org/drawingml/2006/main" xmlns:r="http://schemas.openxmlformats.org/officeDocument/2006/relationships" xmlns:p="http://schemas.openxmlformats.org/presentationml/2006/main">
-  <p:cSld>
-    <p:spTree>
-      <p:nvGrpSpPr>
-        <p:cNvPr id="1" name=""/>
-        <p:cNvGrpSpPr/>
-        <p:nvPr/>
-      </p:nvGrpSpPr>
-      <p:grpSpPr>
-        <a:xfrm>
-          <a:off x="0" y="0"/>
-          <a:ext cx="0" cy="0"/>
-          <a:chOff x="0" y="0"/>
-          <a:chExt cx="0" cy="0"/>
-        </a:xfrm>
-      </p:grpSpPr>
-    </p:spTree>
-  </p:cSld>
-  <p:clrMapOvr>
-    <a:masterClrMapping/>
-  </p:clrMapOvr>
-</p:sld>
-</file>
-
-<file path=ppt/slides/slide29.xml><?xml version="1.0" encoding="utf-8"?>
-<p:sld xmlns:a="http://schemas.openxmlformats.org/drawingml/2006/main" xmlns:r="http://schemas.openxmlformats.org/officeDocument/2006/relationships" xmlns:p="http://schemas.openxmlformats.org/presentationml/2006/main">
-  <p:cSld>
-    <p:spTree>
-      <p:nvGrpSpPr>
-        <p:cNvPr id="1" name=""/>
-        <p:cNvGrpSpPr/>
-        <p:nvPr/>
-      </p:nvGrpSpPr>
-      <p:grpSpPr>
-        <a:xfrm>
-          <a:off x="0" y="0"/>
-          <a:ext cx="0" cy="0"/>
-          <a:chOff x="0" y="0"/>
-          <a:chExt cx="0" cy="0"/>
-        </a:xfrm>
-      </p:grpSpPr>
-    </p:spTree>
-  </p:cSld>
-  <p:clrMapOvr>
-    <a:masterClrMapping/>
-  </p:clrMapOvr>
-</p:sld>
-</file>
-
 <file path=ppt/slides/slide3.xml><?xml version="1.0" encoding="utf-8"?>
 <p:sld xmlns:a="http://schemas.openxmlformats.org/drawingml/2006/main" xmlns:r="http://schemas.openxmlformats.org/officeDocument/2006/relationships" xmlns:p="http://schemas.openxmlformats.org/presentationml/2006/main">
   <p:cSld>
@@ -4157,10 +3784,9 @@
           <a:lstStyle/>
           <a:p>
             <a:r>
-              <a:rPr lang="en-US" sz="3300" b="1" dirty="0" smtClean="0"/>
+              <a:rPr lang="en-US" sz="3300" b="1" dirty="0"/>
               <a:t>Session Tracking in Servlets</a:t>
             </a:r>
-            <a:endParaRPr lang="en-US" sz="3300" b="1" dirty="0"/>
           </a:p>
         </p:txBody>
       </p:sp>
@@ -4186,32 +3812,31 @@
           <a:lstStyle/>
           <a:p>
             <a:r>
-              <a:rPr lang="en-US" sz="3000" b="1" dirty="0" smtClean="0"/>
+              <a:rPr lang="en-US" sz="3000" b="1" dirty="0"/>
               <a:t>Session</a:t>
             </a:r>
             <a:r>
-              <a:rPr lang="en-US" sz="3000" dirty="0" smtClean="0"/>
+              <a:rPr lang="en-US" sz="3000" dirty="0"/>
               <a:t> simply means a particular interval of time.</a:t>
             </a:r>
           </a:p>
           <a:p>
             <a:r>
-              <a:rPr lang="en-US" sz="3000" b="1" dirty="0" smtClean="0"/>
+              <a:rPr lang="en-US" sz="3000" b="1" dirty="0"/>
               <a:t>Session Tracking</a:t>
             </a:r>
             <a:r>
-              <a:rPr lang="en-US" sz="3000" dirty="0" smtClean="0"/>
+              <a:rPr lang="en-US" sz="3000" dirty="0"/>
               <a:t> is a way to maintain state (data) of an user. It is also known as </a:t>
             </a:r>
             <a:r>
-              <a:rPr lang="en-US" sz="3000" b="1" dirty="0" smtClean="0"/>
+              <a:rPr lang="en-US" sz="3000" b="1" dirty="0"/>
               <a:t>session management</a:t>
             </a:r>
             <a:r>
-              <a:rPr lang="en-US" sz="3000" dirty="0" smtClean="0"/>
+              <a:rPr lang="en-US" sz="3000" dirty="0"/>
               <a:t> in servlet.</a:t>
             </a:r>
-            <a:endParaRPr lang="en-US" sz="3000" dirty="0"/>
           </a:p>
         </p:txBody>
       </p:sp>
@@ -4238,301 +3863,51 @@
           <a:lstStyle/>
           <a:p>
             <a:r>
-              <a:rPr lang="en-IN" sz="3000" dirty="0" smtClean="0"/>
+              <a:rPr lang="en-IN" sz="3000" dirty="0"/>
               <a:t>When you are filling the scholarship application </a:t>
             </a:r>
           </a:p>
           <a:p>
             <a:r>
-              <a:rPr lang="en-IN" sz="3000" dirty="0" smtClean="0"/>
+              <a:rPr lang="en-IN" sz="3000" dirty="0"/>
               <a:t>Step1 : college details</a:t>
             </a:r>
           </a:p>
           <a:p>
             <a:r>
-              <a:rPr lang="en-IN" sz="3000" dirty="0" smtClean="0"/>
+              <a:rPr lang="en-IN" sz="3000" dirty="0"/>
               <a:t>Step 2: personal details</a:t>
             </a:r>
           </a:p>
           <a:p>
             <a:r>
-              <a:rPr lang="en-IN" sz="3000" dirty="0" smtClean="0"/>
+              <a:rPr lang="en-IN" sz="3000" dirty="0"/>
               <a:t>Step 3: cast details</a:t>
             </a:r>
           </a:p>
           <a:p>
             <a:r>
-              <a:rPr lang="en-IN" sz="3000" dirty="0" smtClean="0"/>
+              <a:rPr lang="en-IN" sz="3000" dirty="0"/>
               <a:t>Step 4: qualification details </a:t>
             </a:r>
           </a:p>
           <a:p>
-            <a:endParaRPr lang="en-IN" sz="3000" dirty="0" smtClean="0"/>
-          </a:p>
-          <a:p>
-            <a:r>
-              <a:rPr lang="en-IN" sz="3000" dirty="0" smtClean="0"/>
+            <a:endParaRPr lang="en-IN" sz="3000" dirty="0"/>
+          </a:p>
+          <a:p>
+            <a:r>
+              <a:rPr lang="en-IN" sz="3000" dirty="0"/>
               <a:t>When you are filling the  personal details , your </a:t>
             </a:r>
           </a:p>
           <a:p>
             <a:r>
-              <a:rPr lang="en-IN" sz="3000" dirty="0" smtClean="0"/>
+              <a:rPr lang="en-IN" sz="3000" dirty="0"/>
               <a:t>application has to maintain  college details information .</a:t>
             </a:r>
           </a:p>
         </p:txBody>
       </p:sp>
-    </p:spTree>
-  </p:cSld>
-  <p:clrMapOvr>
-    <a:masterClrMapping/>
-  </p:clrMapOvr>
-</p:sld>
-</file>
-
-<file path=ppt/slides/slide30.xml><?xml version="1.0" encoding="utf-8"?>
-<p:sld xmlns:a="http://schemas.openxmlformats.org/drawingml/2006/main" xmlns:r="http://schemas.openxmlformats.org/officeDocument/2006/relationships" xmlns:p="http://schemas.openxmlformats.org/presentationml/2006/main">
-  <p:cSld>
-    <p:spTree>
-      <p:nvGrpSpPr>
-        <p:cNvPr id="1" name=""/>
-        <p:cNvGrpSpPr/>
-        <p:nvPr/>
-      </p:nvGrpSpPr>
-      <p:grpSpPr>
-        <a:xfrm>
-          <a:off x="0" y="0"/>
-          <a:ext cx="0" cy="0"/>
-          <a:chOff x="0" y="0"/>
-          <a:chExt cx="0" cy="0"/>
-        </a:xfrm>
-      </p:grpSpPr>
-    </p:spTree>
-  </p:cSld>
-  <p:clrMapOvr>
-    <a:masterClrMapping/>
-  </p:clrMapOvr>
-</p:sld>
-</file>
-
-<file path=ppt/slides/slide31.xml><?xml version="1.0" encoding="utf-8"?>
-<p:sld xmlns:a="http://schemas.openxmlformats.org/drawingml/2006/main" xmlns:r="http://schemas.openxmlformats.org/officeDocument/2006/relationships" xmlns:p="http://schemas.openxmlformats.org/presentationml/2006/main">
-  <p:cSld>
-    <p:spTree>
-      <p:nvGrpSpPr>
-        <p:cNvPr id="1" name=""/>
-        <p:cNvGrpSpPr/>
-        <p:nvPr/>
-      </p:nvGrpSpPr>
-      <p:grpSpPr>
-        <a:xfrm>
-          <a:off x="0" y="0"/>
-          <a:ext cx="0" cy="0"/>
-          <a:chOff x="0" y="0"/>
-          <a:chExt cx="0" cy="0"/>
-        </a:xfrm>
-      </p:grpSpPr>
-    </p:spTree>
-  </p:cSld>
-  <p:clrMapOvr>
-    <a:masterClrMapping/>
-  </p:clrMapOvr>
-</p:sld>
-</file>
-
-<file path=ppt/slides/slide32.xml><?xml version="1.0" encoding="utf-8"?>
-<p:sld xmlns:a="http://schemas.openxmlformats.org/drawingml/2006/main" xmlns:r="http://schemas.openxmlformats.org/officeDocument/2006/relationships" xmlns:p="http://schemas.openxmlformats.org/presentationml/2006/main">
-  <p:cSld>
-    <p:spTree>
-      <p:nvGrpSpPr>
-        <p:cNvPr id="1" name=""/>
-        <p:cNvGrpSpPr/>
-        <p:nvPr/>
-      </p:nvGrpSpPr>
-      <p:grpSpPr>
-        <a:xfrm>
-          <a:off x="0" y="0"/>
-          <a:ext cx="0" cy="0"/>
-          <a:chOff x="0" y="0"/>
-          <a:chExt cx="0" cy="0"/>
-        </a:xfrm>
-      </p:grpSpPr>
-    </p:spTree>
-  </p:cSld>
-  <p:clrMapOvr>
-    <a:masterClrMapping/>
-  </p:clrMapOvr>
-</p:sld>
-</file>
-
-<file path=ppt/slides/slide33.xml><?xml version="1.0" encoding="utf-8"?>
-<p:sld xmlns:a="http://schemas.openxmlformats.org/drawingml/2006/main" xmlns:r="http://schemas.openxmlformats.org/officeDocument/2006/relationships" xmlns:p="http://schemas.openxmlformats.org/presentationml/2006/main">
-  <p:cSld>
-    <p:spTree>
-      <p:nvGrpSpPr>
-        <p:cNvPr id="1" name=""/>
-        <p:cNvGrpSpPr/>
-        <p:nvPr/>
-      </p:nvGrpSpPr>
-      <p:grpSpPr>
-        <a:xfrm>
-          <a:off x="0" y="0"/>
-          <a:ext cx="0" cy="0"/>
-          <a:chOff x="0" y="0"/>
-          <a:chExt cx="0" cy="0"/>
-        </a:xfrm>
-      </p:grpSpPr>
-    </p:spTree>
-  </p:cSld>
-  <p:clrMapOvr>
-    <a:masterClrMapping/>
-  </p:clrMapOvr>
-</p:sld>
-</file>
-
-<file path=ppt/slides/slide34.xml><?xml version="1.0" encoding="utf-8"?>
-<p:sld xmlns:a="http://schemas.openxmlformats.org/drawingml/2006/main" xmlns:r="http://schemas.openxmlformats.org/officeDocument/2006/relationships" xmlns:p="http://schemas.openxmlformats.org/presentationml/2006/main">
-  <p:cSld>
-    <p:spTree>
-      <p:nvGrpSpPr>
-        <p:cNvPr id="1" name=""/>
-        <p:cNvGrpSpPr/>
-        <p:nvPr/>
-      </p:nvGrpSpPr>
-      <p:grpSpPr>
-        <a:xfrm>
-          <a:off x="0" y="0"/>
-          <a:ext cx="0" cy="0"/>
-          <a:chOff x="0" y="0"/>
-          <a:chExt cx="0" cy="0"/>
-        </a:xfrm>
-      </p:grpSpPr>
-    </p:spTree>
-  </p:cSld>
-  <p:clrMapOvr>
-    <a:masterClrMapping/>
-  </p:clrMapOvr>
-</p:sld>
-</file>
-
-<file path=ppt/slides/slide35.xml><?xml version="1.0" encoding="utf-8"?>
-<p:sld xmlns:a="http://schemas.openxmlformats.org/drawingml/2006/main" xmlns:r="http://schemas.openxmlformats.org/officeDocument/2006/relationships" xmlns:p="http://schemas.openxmlformats.org/presentationml/2006/main">
-  <p:cSld>
-    <p:spTree>
-      <p:nvGrpSpPr>
-        <p:cNvPr id="1" name=""/>
-        <p:cNvGrpSpPr/>
-        <p:nvPr/>
-      </p:nvGrpSpPr>
-      <p:grpSpPr>
-        <a:xfrm>
-          <a:off x="0" y="0"/>
-          <a:ext cx="0" cy="0"/>
-          <a:chOff x="0" y="0"/>
-          <a:chExt cx="0" cy="0"/>
-        </a:xfrm>
-      </p:grpSpPr>
-    </p:spTree>
-  </p:cSld>
-  <p:clrMapOvr>
-    <a:masterClrMapping/>
-  </p:clrMapOvr>
-</p:sld>
-</file>
-
-<file path=ppt/slides/slide36.xml><?xml version="1.0" encoding="utf-8"?>
-<p:sld xmlns:a="http://schemas.openxmlformats.org/drawingml/2006/main" xmlns:r="http://schemas.openxmlformats.org/officeDocument/2006/relationships" xmlns:p="http://schemas.openxmlformats.org/presentationml/2006/main">
-  <p:cSld>
-    <p:spTree>
-      <p:nvGrpSpPr>
-        <p:cNvPr id="1" name=""/>
-        <p:cNvGrpSpPr/>
-        <p:nvPr/>
-      </p:nvGrpSpPr>
-      <p:grpSpPr>
-        <a:xfrm>
-          <a:off x="0" y="0"/>
-          <a:ext cx="0" cy="0"/>
-          <a:chOff x="0" y="0"/>
-          <a:chExt cx="0" cy="0"/>
-        </a:xfrm>
-      </p:grpSpPr>
-    </p:spTree>
-  </p:cSld>
-  <p:clrMapOvr>
-    <a:masterClrMapping/>
-  </p:clrMapOvr>
-</p:sld>
-</file>
-
-<file path=ppt/slides/slide37.xml><?xml version="1.0" encoding="utf-8"?>
-<p:sld xmlns:a="http://schemas.openxmlformats.org/drawingml/2006/main" xmlns:r="http://schemas.openxmlformats.org/officeDocument/2006/relationships" xmlns:p="http://schemas.openxmlformats.org/presentationml/2006/main">
-  <p:cSld>
-    <p:spTree>
-      <p:nvGrpSpPr>
-        <p:cNvPr id="1" name=""/>
-        <p:cNvGrpSpPr/>
-        <p:nvPr/>
-      </p:nvGrpSpPr>
-      <p:grpSpPr>
-        <a:xfrm>
-          <a:off x="0" y="0"/>
-          <a:ext cx="0" cy="0"/>
-          <a:chOff x="0" y="0"/>
-          <a:chExt cx="0" cy="0"/>
-        </a:xfrm>
-      </p:grpSpPr>
-    </p:spTree>
-  </p:cSld>
-  <p:clrMapOvr>
-    <a:masterClrMapping/>
-  </p:clrMapOvr>
-</p:sld>
-</file>
-
-<file path=ppt/slides/slide38.xml><?xml version="1.0" encoding="utf-8"?>
-<p:sld xmlns:a="http://schemas.openxmlformats.org/drawingml/2006/main" xmlns:r="http://schemas.openxmlformats.org/officeDocument/2006/relationships" xmlns:p="http://schemas.openxmlformats.org/presentationml/2006/main">
-  <p:cSld>
-    <p:spTree>
-      <p:nvGrpSpPr>
-        <p:cNvPr id="1" name=""/>
-        <p:cNvGrpSpPr/>
-        <p:nvPr/>
-      </p:nvGrpSpPr>
-      <p:grpSpPr>
-        <a:xfrm>
-          <a:off x="0" y="0"/>
-          <a:ext cx="0" cy="0"/>
-          <a:chOff x="0" y="0"/>
-          <a:chExt cx="0" cy="0"/>
-        </a:xfrm>
-      </p:grpSpPr>
-    </p:spTree>
-  </p:cSld>
-  <p:clrMapOvr>
-    <a:masterClrMapping/>
-  </p:clrMapOvr>
-</p:sld>
-</file>
-
-<file path=ppt/slides/slide39.xml><?xml version="1.0" encoding="utf-8"?>
-<p:sld xmlns:a="http://schemas.openxmlformats.org/drawingml/2006/main" xmlns:r="http://schemas.openxmlformats.org/officeDocument/2006/relationships" xmlns:p="http://schemas.openxmlformats.org/presentationml/2006/main">
-  <p:cSld>
-    <p:spTree>
-      <p:nvGrpSpPr>
-        <p:cNvPr id="1" name=""/>
-        <p:cNvGrpSpPr/>
-        <p:nvPr/>
-      </p:nvGrpSpPr>
-      <p:grpSpPr>
-        <a:xfrm>
-          <a:off x="0" y="0"/>
-          <a:ext cx="0" cy="0"/>
-          <a:chOff x="0" y="0"/>
-          <a:chExt cx="0" cy="0"/>
-        </a:xfrm>
-      </p:grpSpPr>
     </p:spTree>
   </p:cSld>
   <p:clrMapOvr>
@@ -4580,263 +3955,12 @@
           <a:lstStyle/>
           <a:p>
             <a:r>
-              <a:rPr lang="en-US" sz="4000" dirty="0" smtClean="0"/>
+              <a:rPr lang="en-US" sz="4000" dirty="0"/>
               <a:t>To maintain client previous request details at the time of processing later request use session tracking mechanism.</a:t>
             </a:r>
-            <a:endParaRPr lang="en-US" sz="4000" dirty="0"/>
-          </a:p>
-        </p:txBody>
-      </p:sp>
-    </p:spTree>
-  </p:cSld>
-  <p:clrMapOvr>
-    <a:masterClrMapping/>
-  </p:clrMapOvr>
-</p:sld>
-</file>
-
-<file path=ppt/slides/slide40.xml><?xml version="1.0" encoding="utf-8"?>
-<p:sld xmlns:a="http://schemas.openxmlformats.org/drawingml/2006/main" xmlns:r="http://schemas.openxmlformats.org/officeDocument/2006/relationships" xmlns:p="http://schemas.openxmlformats.org/presentationml/2006/main">
-  <p:cSld>
-    <p:spTree>
-      <p:nvGrpSpPr>
-        <p:cNvPr id="1" name=""/>
-        <p:cNvGrpSpPr/>
-        <p:nvPr/>
-      </p:nvGrpSpPr>
-      <p:grpSpPr>
-        <a:xfrm>
-          <a:off x="0" y="0"/>
-          <a:ext cx="0" cy="0"/>
-          <a:chOff x="0" y="0"/>
-          <a:chExt cx="0" cy="0"/>
-        </a:xfrm>
-      </p:grpSpPr>
-    </p:spTree>
-  </p:cSld>
-  <p:clrMapOvr>
-    <a:masterClrMapping/>
-  </p:clrMapOvr>
-</p:sld>
-</file>
-
-<file path=ppt/slides/slide41.xml><?xml version="1.0" encoding="utf-8"?>
-<p:sld xmlns:a="http://schemas.openxmlformats.org/drawingml/2006/main" xmlns:r="http://schemas.openxmlformats.org/officeDocument/2006/relationships" xmlns:p="http://schemas.openxmlformats.org/presentationml/2006/main">
-  <p:cSld>
-    <p:spTree>
-      <p:nvGrpSpPr>
-        <p:cNvPr id="1" name=""/>
-        <p:cNvGrpSpPr/>
-        <p:nvPr/>
-      </p:nvGrpSpPr>
-      <p:grpSpPr>
-        <a:xfrm>
-          <a:off x="0" y="0"/>
-          <a:ext cx="0" cy="0"/>
-          <a:chOff x="0" y="0"/>
-          <a:chExt cx="0" cy="0"/>
-        </a:xfrm>
-      </p:grpSpPr>
-    </p:spTree>
-  </p:cSld>
-  <p:clrMapOvr>
-    <a:masterClrMapping/>
-  </p:clrMapOvr>
-</p:sld>
-</file>
-
-<file path=ppt/slides/slide42.xml><?xml version="1.0" encoding="utf-8"?>
-<p:sld xmlns:a="http://schemas.openxmlformats.org/drawingml/2006/main" xmlns:r="http://schemas.openxmlformats.org/officeDocument/2006/relationships" xmlns:p="http://schemas.openxmlformats.org/presentationml/2006/main">
-  <p:cSld>
-    <p:spTree>
-      <p:nvGrpSpPr>
-        <p:cNvPr id="1" name=""/>
-        <p:cNvGrpSpPr/>
-        <p:nvPr/>
-      </p:nvGrpSpPr>
-      <p:grpSpPr>
-        <a:xfrm>
-          <a:off x="0" y="0"/>
-          <a:ext cx="0" cy="0"/>
-          <a:chOff x="0" y="0"/>
-          <a:chExt cx="0" cy="0"/>
-        </a:xfrm>
-      </p:grpSpPr>
-    </p:spTree>
-  </p:cSld>
-  <p:clrMapOvr>
-    <a:masterClrMapping/>
-  </p:clrMapOvr>
-</p:sld>
-</file>
-
-<file path=ppt/slides/slide43.xml><?xml version="1.0" encoding="utf-8"?>
-<p:sld xmlns:a="http://schemas.openxmlformats.org/drawingml/2006/main" xmlns:r="http://schemas.openxmlformats.org/officeDocument/2006/relationships" xmlns:p="http://schemas.openxmlformats.org/presentationml/2006/main">
-  <p:cSld>
-    <p:spTree>
-      <p:nvGrpSpPr>
-        <p:cNvPr id="1" name=""/>
-        <p:cNvGrpSpPr/>
-        <p:nvPr/>
-      </p:nvGrpSpPr>
-      <p:grpSpPr>
-        <a:xfrm>
-          <a:off x="0" y="0"/>
-          <a:ext cx="0" cy="0"/>
-          <a:chOff x="0" y="0"/>
-          <a:chExt cx="0" cy="0"/>
-        </a:xfrm>
-      </p:grpSpPr>
-    </p:spTree>
-  </p:cSld>
-  <p:clrMapOvr>
-    <a:masterClrMapping/>
-  </p:clrMapOvr>
-</p:sld>
-</file>
-
-<file path=ppt/slides/slide44.xml><?xml version="1.0" encoding="utf-8"?>
-<p:sld xmlns:a="http://schemas.openxmlformats.org/drawingml/2006/main" xmlns:r="http://schemas.openxmlformats.org/officeDocument/2006/relationships" xmlns:p="http://schemas.openxmlformats.org/presentationml/2006/main">
-  <p:cSld>
-    <p:spTree>
-      <p:nvGrpSpPr>
-        <p:cNvPr id="1" name=""/>
-        <p:cNvGrpSpPr/>
-        <p:nvPr/>
-      </p:nvGrpSpPr>
-      <p:grpSpPr>
-        <a:xfrm>
-          <a:off x="0" y="0"/>
-          <a:ext cx="0" cy="0"/>
-          <a:chOff x="0" y="0"/>
-          <a:chExt cx="0" cy="0"/>
-        </a:xfrm>
-      </p:grpSpPr>
-    </p:spTree>
-  </p:cSld>
-  <p:clrMapOvr>
-    <a:masterClrMapping/>
-  </p:clrMapOvr>
-</p:sld>
-</file>
-
-<file path=ppt/slides/slide45.xml><?xml version="1.0" encoding="utf-8"?>
-<p:sld xmlns:a="http://schemas.openxmlformats.org/drawingml/2006/main" xmlns:r="http://schemas.openxmlformats.org/officeDocument/2006/relationships" xmlns:p="http://schemas.openxmlformats.org/presentationml/2006/main">
-  <p:cSld>
-    <p:spTree>
-      <p:nvGrpSpPr>
-        <p:cNvPr id="1" name=""/>
-        <p:cNvGrpSpPr/>
-        <p:nvPr/>
-      </p:nvGrpSpPr>
-      <p:grpSpPr>
-        <a:xfrm>
-          <a:off x="0" y="0"/>
-          <a:ext cx="0" cy="0"/>
-          <a:chOff x="0" y="0"/>
-          <a:chExt cx="0" cy="0"/>
-        </a:xfrm>
-      </p:grpSpPr>
-    </p:spTree>
-  </p:cSld>
-  <p:clrMapOvr>
-    <a:masterClrMapping/>
-  </p:clrMapOvr>
-</p:sld>
-</file>
-
-<file path=ppt/slides/slide46.xml><?xml version="1.0" encoding="utf-8"?>
-<p:sld xmlns:a="http://schemas.openxmlformats.org/drawingml/2006/main" xmlns:r="http://schemas.openxmlformats.org/officeDocument/2006/relationships" xmlns:p="http://schemas.openxmlformats.org/presentationml/2006/main">
-  <p:cSld>
-    <p:spTree>
-      <p:nvGrpSpPr>
-        <p:cNvPr id="1" name=""/>
-        <p:cNvGrpSpPr/>
-        <p:nvPr/>
-      </p:nvGrpSpPr>
-      <p:grpSpPr>
-        <a:xfrm>
-          <a:off x="0" y="0"/>
-          <a:ext cx="0" cy="0"/>
-          <a:chOff x="0" y="0"/>
-          <a:chExt cx="0" cy="0"/>
-        </a:xfrm>
-      </p:grpSpPr>
-    </p:spTree>
-  </p:cSld>
-  <p:clrMapOvr>
-    <a:masterClrMapping/>
-  </p:clrMapOvr>
-</p:sld>
-</file>
-
-<file path=ppt/slides/slide47.xml><?xml version="1.0" encoding="utf-8"?>
-<p:sld xmlns:a="http://schemas.openxmlformats.org/drawingml/2006/main" xmlns:r="http://schemas.openxmlformats.org/officeDocument/2006/relationships" xmlns:p="http://schemas.openxmlformats.org/presentationml/2006/main">
-  <p:cSld>
-    <p:spTree>
-      <p:nvGrpSpPr>
-        <p:cNvPr id="1" name=""/>
-        <p:cNvGrpSpPr/>
-        <p:nvPr/>
-      </p:nvGrpSpPr>
-      <p:grpSpPr>
-        <a:xfrm>
-          <a:off x="0" y="0"/>
-          <a:ext cx="0" cy="0"/>
-          <a:chOff x="0" y="0"/>
-          <a:chExt cx="0" cy="0"/>
-        </a:xfrm>
-      </p:grpSpPr>
-    </p:spTree>
-  </p:cSld>
-  <p:clrMapOvr>
-    <a:masterClrMapping/>
-  </p:clrMapOvr>
-</p:sld>
-</file>
-
-<file path=ppt/slides/slide48.xml><?xml version="1.0" encoding="utf-8"?>
-<p:sld xmlns:a="http://schemas.openxmlformats.org/drawingml/2006/main" xmlns:r="http://schemas.openxmlformats.org/officeDocument/2006/relationships" xmlns:p="http://schemas.openxmlformats.org/presentationml/2006/main">
-  <p:cSld>
-    <p:spTree>
-      <p:nvGrpSpPr>
-        <p:cNvPr id="1" name=""/>
-        <p:cNvGrpSpPr/>
-        <p:nvPr/>
-      </p:nvGrpSpPr>
-      <p:grpSpPr>
-        <a:xfrm>
-          <a:off x="0" y="0"/>
-          <a:ext cx="0" cy="0"/>
-          <a:chOff x="0" y="0"/>
-          <a:chExt cx="0" cy="0"/>
-        </a:xfrm>
-      </p:grpSpPr>
-    </p:spTree>
-  </p:cSld>
-  <p:clrMapOvr>
-    <a:masterClrMapping/>
-  </p:clrMapOvr>
-</p:sld>
-</file>
-
-<file path=ppt/slides/slide49.xml><?xml version="1.0" encoding="utf-8"?>
-<p:sld xmlns:a="http://schemas.openxmlformats.org/drawingml/2006/main" xmlns:r="http://schemas.openxmlformats.org/officeDocument/2006/relationships" xmlns:p="http://schemas.openxmlformats.org/presentationml/2006/main">
-  <p:cSld>
-    <p:spTree>
-      <p:nvGrpSpPr>
-        <p:cNvPr id="1" name=""/>
-        <p:cNvGrpSpPr/>
-        <p:nvPr/>
-      </p:nvGrpSpPr>
-      <p:grpSpPr>
-        <a:xfrm>
-          <a:off x="0" y="0"/>
-          <a:ext cx="0" cy="0"/>
-          <a:chOff x="0" y="0"/>
-          <a:chExt cx="0" cy="0"/>
-        </a:xfrm>
-      </p:grpSpPr>
+          </a:p>
+        </p:txBody>
+      </p:sp>
     </p:spTree>
   </p:cSld>
   <p:clrMapOvr>
@@ -4885,7 +4009,7 @@
           <a:lstStyle/>
           <a:p>
             <a:r>
-              <a:rPr lang="en-US" sz="3000" dirty="0" smtClean="0"/>
+              <a:rPr lang="en-US" sz="3000" dirty="0"/>
               <a:t>There are three types of session tracking mechanisms</a:t>
             </a:r>
           </a:p>
@@ -4894,15 +4018,15 @@
               <a:buNone/>
             </a:pPr>
             <a:r>
-              <a:rPr lang="en-US" sz="3000" dirty="0" smtClean="0"/>
+              <a:rPr lang="en-US" sz="3000" dirty="0"/>
               <a:t> </a:t>
             </a:r>
             <a:r>
-              <a:rPr lang="en-US" sz="3000" b="1" dirty="0" err="1" smtClean="0"/>
+              <a:rPr lang="en-US" sz="3000" b="1" dirty="0" err="1"/>
               <a:t>a.HttpSession</a:t>
             </a:r>
             <a:r>
-              <a:rPr lang="en-US" sz="3000" dirty="0" smtClean="0"/>
+              <a:rPr lang="en-US" sz="3000" dirty="0"/>
               <a:t> Tracking mechanism</a:t>
             </a:r>
           </a:p>
@@ -4911,19 +4035,19 @@
               <a:buNone/>
             </a:pPr>
             <a:r>
-              <a:rPr lang="en-IN" sz="3000" dirty="0" smtClean="0"/>
+              <a:rPr lang="en-IN" sz="3000" dirty="0"/>
               <a:t> we will  </a:t>
             </a:r>
             <a:r>
-              <a:rPr lang="en-US" sz="3000" dirty="0" smtClean="0"/>
+              <a:rPr lang="en-US" sz="3000" dirty="0"/>
               <a:t>maintain client previous request details at the time of processing later request at server side  using  </a:t>
             </a:r>
             <a:r>
-              <a:rPr lang="en-US" sz="3000" dirty="0" err="1" smtClean="0"/>
+              <a:rPr lang="en-US" sz="3000" dirty="0" err="1"/>
               <a:t>HttpSession</a:t>
             </a:r>
             <a:r>
-              <a:rPr lang="en-US" sz="3000" dirty="0" smtClean="0"/>
+              <a:rPr lang="en-US" sz="3000" dirty="0"/>
               <a:t> object.</a:t>
             </a:r>
           </a:p>
@@ -4932,15 +4056,15 @@
               <a:buNone/>
             </a:pPr>
             <a:r>
-              <a:rPr lang="en-IN" sz="3000" dirty="0" smtClean="0"/>
+              <a:rPr lang="en-IN" sz="3000" dirty="0"/>
               <a:t>b. </a:t>
             </a:r>
             <a:r>
-              <a:rPr lang="en-IN" sz="3000" b="1" dirty="0" smtClean="0"/>
+              <a:rPr lang="en-IN" sz="3000" b="1" dirty="0"/>
               <a:t>Cookies</a:t>
             </a:r>
             <a:r>
-              <a:rPr lang="en-IN" sz="3000" dirty="0" smtClean="0"/>
+              <a:rPr lang="en-IN" sz="3000" dirty="0"/>
               <a:t> Session Tracking Mechanism</a:t>
             </a:r>
           </a:p>
@@ -4949,15 +4073,15 @@
               <a:buNone/>
             </a:pPr>
             <a:r>
-              <a:rPr lang="en-IN" sz="3000" dirty="0" smtClean="0"/>
+              <a:rPr lang="en-IN" sz="3000" dirty="0"/>
               <a:t>   we will  </a:t>
             </a:r>
             <a:r>
-              <a:rPr lang="en-US" sz="3000" dirty="0" smtClean="0"/>
+              <a:rPr lang="en-US" sz="3000" dirty="0"/>
               <a:t>maintain client previous request details at the time of processing later request at server side  using </a:t>
             </a:r>
             <a:r>
-              <a:rPr lang="en-IN" sz="3000" dirty="0" smtClean="0"/>
+              <a:rPr lang="en-IN" sz="3000" dirty="0"/>
               <a:t>Cookies </a:t>
             </a:r>
           </a:p>
@@ -4966,15 +4090,15 @@
               <a:buNone/>
             </a:pPr>
             <a:r>
-              <a:rPr lang="en-IN" sz="3000" dirty="0" smtClean="0"/>
+              <a:rPr lang="en-IN" sz="3000" dirty="0"/>
               <a:t>C.</a:t>
             </a:r>
             <a:r>
-              <a:rPr lang="en-US" sz="3000" b="1" dirty="0" smtClean="0"/>
+              <a:rPr lang="en-US" sz="3000" b="1" dirty="0"/>
               <a:t> URL Rewriting </a:t>
             </a:r>
             <a:r>
-              <a:rPr lang="en-IN" sz="3000" dirty="0" smtClean="0"/>
+              <a:rPr lang="en-IN" sz="3000" dirty="0"/>
               <a:t>Session Tracking Mechanism </a:t>
             </a:r>
           </a:p>
@@ -4982,260 +4106,10 @@
             <a:pPr>
               <a:buNone/>
             </a:pPr>
-            <a:endParaRPr lang="en-IN" sz="3000" dirty="0" smtClean="0"/>
-          </a:p>
-        </p:txBody>
-      </p:sp>
-    </p:spTree>
-  </p:cSld>
-  <p:clrMapOvr>
-    <a:masterClrMapping/>
-  </p:clrMapOvr>
-</p:sld>
-</file>
-
-<file path=ppt/slides/slide50.xml><?xml version="1.0" encoding="utf-8"?>
-<p:sld xmlns:a="http://schemas.openxmlformats.org/drawingml/2006/main" xmlns:r="http://schemas.openxmlformats.org/officeDocument/2006/relationships" xmlns:p="http://schemas.openxmlformats.org/presentationml/2006/main">
-  <p:cSld>
-    <p:spTree>
-      <p:nvGrpSpPr>
-        <p:cNvPr id="1" name=""/>
-        <p:cNvGrpSpPr/>
-        <p:nvPr/>
-      </p:nvGrpSpPr>
-      <p:grpSpPr>
-        <a:xfrm>
-          <a:off x="0" y="0"/>
-          <a:ext cx="0" cy="0"/>
-          <a:chOff x="0" y="0"/>
-          <a:chExt cx="0" cy="0"/>
-        </a:xfrm>
-      </p:grpSpPr>
-    </p:spTree>
-  </p:cSld>
-  <p:clrMapOvr>
-    <a:masterClrMapping/>
-  </p:clrMapOvr>
-</p:sld>
-</file>
-
-<file path=ppt/slides/slide51.xml><?xml version="1.0" encoding="utf-8"?>
-<p:sld xmlns:a="http://schemas.openxmlformats.org/drawingml/2006/main" xmlns:r="http://schemas.openxmlformats.org/officeDocument/2006/relationships" xmlns:p="http://schemas.openxmlformats.org/presentationml/2006/main">
-  <p:cSld>
-    <p:spTree>
-      <p:nvGrpSpPr>
-        <p:cNvPr id="1" name=""/>
-        <p:cNvGrpSpPr/>
-        <p:nvPr/>
-      </p:nvGrpSpPr>
-      <p:grpSpPr>
-        <a:xfrm>
-          <a:off x="0" y="0"/>
-          <a:ext cx="0" cy="0"/>
-          <a:chOff x="0" y="0"/>
-          <a:chExt cx="0" cy="0"/>
-        </a:xfrm>
-      </p:grpSpPr>
-    </p:spTree>
-  </p:cSld>
-  <p:clrMapOvr>
-    <a:masterClrMapping/>
-  </p:clrMapOvr>
-</p:sld>
-</file>
-
-<file path=ppt/slides/slide52.xml><?xml version="1.0" encoding="utf-8"?>
-<p:sld xmlns:a="http://schemas.openxmlformats.org/drawingml/2006/main" xmlns:r="http://schemas.openxmlformats.org/officeDocument/2006/relationships" xmlns:p="http://schemas.openxmlformats.org/presentationml/2006/main">
-  <p:cSld>
-    <p:spTree>
-      <p:nvGrpSpPr>
-        <p:cNvPr id="1" name=""/>
-        <p:cNvGrpSpPr/>
-        <p:nvPr/>
-      </p:nvGrpSpPr>
-      <p:grpSpPr>
-        <a:xfrm>
-          <a:off x="0" y="0"/>
-          <a:ext cx="0" cy="0"/>
-          <a:chOff x="0" y="0"/>
-          <a:chExt cx="0" cy="0"/>
-        </a:xfrm>
-      </p:grpSpPr>
-    </p:spTree>
-  </p:cSld>
-  <p:clrMapOvr>
-    <a:masterClrMapping/>
-  </p:clrMapOvr>
-</p:sld>
-</file>
-
-<file path=ppt/slides/slide53.xml><?xml version="1.0" encoding="utf-8"?>
-<p:sld xmlns:a="http://schemas.openxmlformats.org/drawingml/2006/main" xmlns:r="http://schemas.openxmlformats.org/officeDocument/2006/relationships" xmlns:p="http://schemas.openxmlformats.org/presentationml/2006/main">
-  <p:cSld>
-    <p:spTree>
-      <p:nvGrpSpPr>
-        <p:cNvPr id="1" name=""/>
-        <p:cNvGrpSpPr/>
-        <p:nvPr/>
-      </p:nvGrpSpPr>
-      <p:grpSpPr>
-        <a:xfrm>
-          <a:off x="0" y="0"/>
-          <a:ext cx="0" cy="0"/>
-          <a:chOff x="0" y="0"/>
-          <a:chExt cx="0" cy="0"/>
-        </a:xfrm>
-      </p:grpSpPr>
-    </p:spTree>
-  </p:cSld>
-  <p:clrMapOvr>
-    <a:masterClrMapping/>
-  </p:clrMapOvr>
-</p:sld>
-</file>
-
-<file path=ppt/slides/slide54.xml><?xml version="1.0" encoding="utf-8"?>
-<p:sld xmlns:a="http://schemas.openxmlformats.org/drawingml/2006/main" xmlns:r="http://schemas.openxmlformats.org/officeDocument/2006/relationships" xmlns:p="http://schemas.openxmlformats.org/presentationml/2006/main">
-  <p:cSld>
-    <p:spTree>
-      <p:nvGrpSpPr>
-        <p:cNvPr id="1" name=""/>
-        <p:cNvGrpSpPr/>
-        <p:nvPr/>
-      </p:nvGrpSpPr>
-      <p:grpSpPr>
-        <a:xfrm>
-          <a:off x="0" y="0"/>
-          <a:ext cx="0" cy="0"/>
-          <a:chOff x="0" y="0"/>
-          <a:chExt cx="0" cy="0"/>
-        </a:xfrm>
-      </p:grpSpPr>
-    </p:spTree>
-  </p:cSld>
-  <p:clrMapOvr>
-    <a:masterClrMapping/>
-  </p:clrMapOvr>
-</p:sld>
-</file>
-
-<file path=ppt/slides/slide55.xml><?xml version="1.0" encoding="utf-8"?>
-<p:sld xmlns:a="http://schemas.openxmlformats.org/drawingml/2006/main" xmlns:r="http://schemas.openxmlformats.org/officeDocument/2006/relationships" xmlns:p="http://schemas.openxmlformats.org/presentationml/2006/main">
-  <p:cSld>
-    <p:spTree>
-      <p:nvGrpSpPr>
-        <p:cNvPr id="1" name=""/>
-        <p:cNvGrpSpPr/>
-        <p:nvPr/>
-      </p:nvGrpSpPr>
-      <p:grpSpPr>
-        <a:xfrm>
-          <a:off x="0" y="0"/>
-          <a:ext cx="0" cy="0"/>
-          <a:chOff x="0" y="0"/>
-          <a:chExt cx="0" cy="0"/>
-        </a:xfrm>
-      </p:grpSpPr>
-    </p:spTree>
-  </p:cSld>
-  <p:clrMapOvr>
-    <a:masterClrMapping/>
-  </p:clrMapOvr>
-</p:sld>
-</file>
-
-<file path=ppt/slides/slide56.xml><?xml version="1.0" encoding="utf-8"?>
-<p:sld xmlns:a="http://schemas.openxmlformats.org/drawingml/2006/main" xmlns:r="http://schemas.openxmlformats.org/officeDocument/2006/relationships" xmlns:p="http://schemas.openxmlformats.org/presentationml/2006/main">
-  <p:cSld>
-    <p:spTree>
-      <p:nvGrpSpPr>
-        <p:cNvPr id="1" name=""/>
-        <p:cNvGrpSpPr/>
-        <p:nvPr/>
-      </p:nvGrpSpPr>
-      <p:grpSpPr>
-        <a:xfrm>
-          <a:off x="0" y="0"/>
-          <a:ext cx="0" cy="0"/>
-          <a:chOff x="0" y="0"/>
-          <a:chExt cx="0" cy="0"/>
-        </a:xfrm>
-      </p:grpSpPr>
-    </p:spTree>
-  </p:cSld>
-  <p:clrMapOvr>
-    <a:masterClrMapping/>
-  </p:clrMapOvr>
-</p:sld>
-</file>
-
-<file path=ppt/slides/slide57.xml><?xml version="1.0" encoding="utf-8"?>
-<p:sld xmlns:a="http://schemas.openxmlformats.org/drawingml/2006/main" xmlns:r="http://schemas.openxmlformats.org/officeDocument/2006/relationships" xmlns:p="http://schemas.openxmlformats.org/presentationml/2006/main">
-  <p:cSld>
-    <p:spTree>
-      <p:nvGrpSpPr>
-        <p:cNvPr id="1" name=""/>
-        <p:cNvGrpSpPr/>
-        <p:nvPr/>
-      </p:nvGrpSpPr>
-      <p:grpSpPr>
-        <a:xfrm>
-          <a:off x="0" y="0"/>
-          <a:ext cx="0" cy="0"/>
-          <a:chOff x="0" y="0"/>
-          <a:chExt cx="0" cy="0"/>
-        </a:xfrm>
-      </p:grpSpPr>
-    </p:spTree>
-  </p:cSld>
-  <p:clrMapOvr>
-    <a:masterClrMapping/>
-  </p:clrMapOvr>
-</p:sld>
-</file>
-
-<file path=ppt/slides/slide58.xml><?xml version="1.0" encoding="utf-8"?>
-<p:sld xmlns:a="http://schemas.openxmlformats.org/drawingml/2006/main" xmlns:r="http://schemas.openxmlformats.org/officeDocument/2006/relationships" xmlns:p="http://schemas.openxmlformats.org/presentationml/2006/main">
-  <p:cSld>
-    <p:spTree>
-      <p:nvGrpSpPr>
-        <p:cNvPr id="1" name=""/>
-        <p:cNvGrpSpPr/>
-        <p:nvPr/>
-      </p:nvGrpSpPr>
-      <p:grpSpPr>
-        <a:xfrm>
-          <a:off x="0" y="0"/>
-          <a:ext cx="0" cy="0"/>
-          <a:chOff x="0" y="0"/>
-          <a:chExt cx="0" cy="0"/>
-        </a:xfrm>
-      </p:grpSpPr>
-    </p:spTree>
-  </p:cSld>
-  <p:clrMapOvr>
-    <a:masterClrMapping/>
-  </p:clrMapOvr>
-</p:sld>
-</file>
-
-<file path=ppt/slides/slide59.xml><?xml version="1.0" encoding="utf-8"?>
-<p:sld xmlns:a="http://schemas.openxmlformats.org/drawingml/2006/main" xmlns:r="http://schemas.openxmlformats.org/officeDocument/2006/relationships" xmlns:p="http://schemas.openxmlformats.org/presentationml/2006/main">
-  <p:cSld>
-    <p:spTree>
-      <p:nvGrpSpPr>
-        <p:cNvPr id="1" name=""/>
-        <p:cNvGrpSpPr/>
-        <p:nvPr/>
-      </p:nvGrpSpPr>
-      <p:grpSpPr>
-        <a:xfrm>
-          <a:off x="0" y="0"/>
-          <a:ext cx="0" cy="0"/>
-          <a:chOff x="0" y="0"/>
-          <a:chExt cx="0" cy="0"/>
-        </a:xfrm>
-      </p:grpSpPr>
+            <a:endParaRPr lang="en-IN" sz="3000" dirty="0"/>
+          </a:p>
+        </p:txBody>
+      </p:sp>
     </p:spTree>
   </p:cSld>
   <p:clrMapOvr>
@@ -5283,24 +4157,16 @@
           <a:lstStyle/>
           <a:p>
             <a:r>
-              <a:rPr lang="en-US" sz="3000" b="1" dirty="0" smtClean="0"/>
-              <a:t>a</a:t>
-            </a:r>
-            <a:r>
-              <a:rPr lang="en-US" sz="3000" b="1" dirty="0" smtClean="0"/>
-              <a:t>. </a:t>
-            </a:r>
-            <a:r>
-              <a:rPr lang="en-US" sz="3000" b="1" dirty="0" err="1" smtClean="0"/>
+              <a:rPr lang="en-US" sz="3000" b="1" dirty="0"/>
+              <a:t>a. </a:t>
+            </a:r>
+            <a:r>
+              <a:rPr lang="en-US" sz="3000" b="1" dirty="0" err="1"/>
               <a:t>HttpSession</a:t>
             </a:r>
             <a:r>
-              <a:rPr lang="en-US" sz="3000" b="1" dirty="0" smtClean="0"/>
-              <a:t> </a:t>
-            </a:r>
-            <a:r>
-              <a:rPr lang="en-US" sz="3000" b="1" dirty="0" smtClean="0"/>
-              <a:t>Tracking mechanism</a:t>
+              <a:rPr lang="en-US" sz="3000" b="1" dirty="0"/>
+              <a:t> Tracking mechanism</a:t>
             </a:r>
           </a:p>
         </p:txBody>
@@ -5327,25 +4193,25 @@
           <a:lstStyle/>
           <a:p>
             <a:r>
-              <a:rPr lang="en-IN" sz="3000" dirty="0" smtClean="0"/>
+              <a:rPr lang="en-IN" sz="3000" dirty="0"/>
               <a:t>we will  </a:t>
             </a:r>
             <a:r>
-              <a:rPr lang="en-US" sz="3000" dirty="0" smtClean="0"/>
+              <a:rPr lang="en-US" sz="3000" dirty="0"/>
               <a:t>maintain client previous request details at the time of</a:t>
             </a:r>
           </a:p>
           <a:p>
             <a:r>
-              <a:rPr lang="en-US" sz="3000" dirty="0" smtClean="0"/>
+              <a:rPr lang="en-US" sz="3000" dirty="0"/>
               <a:t>processing later request at server side with the help of </a:t>
             </a:r>
             <a:r>
-              <a:rPr lang="en-US" sz="3000" dirty="0" err="1" smtClean="0"/>
+              <a:rPr lang="en-US" sz="3000" dirty="0" err="1"/>
               <a:t>HttpSession</a:t>
             </a:r>
             <a:r>
-              <a:rPr lang="en-US" sz="3000" dirty="0" smtClean="0"/>
+              <a:rPr lang="en-US" sz="3000" dirty="0"/>
               <a:t> object.</a:t>
             </a:r>
           </a:p>
@@ -5374,90 +4240,40 @@
           <a:lstStyle/>
           <a:p>
             <a:r>
-              <a:rPr lang="en-IN" sz="3000" dirty="0" smtClean="0"/>
+              <a:rPr lang="en-IN" sz="3000" dirty="0"/>
               <a:t>Lets say we have 3 forms </a:t>
             </a:r>
           </a:p>
           <a:p>
-            <a:endParaRPr lang="en-IN" sz="3000" dirty="0" smtClean="0"/>
-          </a:p>
-          <a:p>
-            <a:r>
-              <a:rPr lang="en-IN" sz="3000" dirty="0" smtClean="0"/>
+            <a:endParaRPr lang="en-IN" sz="3000" dirty="0"/>
+          </a:p>
+          <a:p>
+            <a:r>
+              <a:rPr lang="en-IN" sz="3000" dirty="0"/>
               <a:t>Form1.html </a:t>
             </a:r>
           </a:p>
           <a:p>
-            <a:endParaRPr lang="en-IN" sz="3000" dirty="0" smtClean="0"/>
-          </a:p>
-          <a:p>
-            <a:r>
-              <a:rPr lang="en-IN" sz="3000" dirty="0" smtClean="0"/>
+            <a:endParaRPr lang="en-IN" sz="3000" dirty="0"/>
+          </a:p>
+          <a:p>
+            <a:r>
+              <a:rPr lang="en-IN" sz="3000" dirty="0"/>
               <a:t>Form2.html</a:t>
             </a:r>
           </a:p>
           <a:p>
-            <a:endParaRPr lang="en-IN" sz="3000" dirty="0" smtClean="0"/>
-          </a:p>
-          <a:p>
-            <a:r>
-              <a:rPr lang="en-IN" sz="3000" dirty="0" smtClean="0"/>
+            <a:endParaRPr lang="en-IN" sz="3000" dirty="0"/>
+          </a:p>
+          <a:p>
+            <a:r>
+              <a:rPr lang="en-IN" sz="3000" dirty="0"/>
               <a:t>Form3.html</a:t>
             </a:r>
             <a:endParaRPr lang="en-US" sz="3000" dirty="0"/>
           </a:p>
         </p:txBody>
       </p:sp>
-    </p:spTree>
-  </p:cSld>
-  <p:clrMapOvr>
-    <a:masterClrMapping/>
-  </p:clrMapOvr>
-</p:sld>
-</file>
-
-<file path=ppt/slides/slide60.xml><?xml version="1.0" encoding="utf-8"?>
-<p:sld xmlns:a="http://schemas.openxmlformats.org/drawingml/2006/main" xmlns:r="http://schemas.openxmlformats.org/officeDocument/2006/relationships" xmlns:p="http://schemas.openxmlformats.org/presentationml/2006/main">
-  <p:cSld>
-    <p:spTree>
-      <p:nvGrpSpPr>
-        <p:cNvPr id="1" name=""/>
-        <p:cNvGrpSpPr/>
-        <p:nvPr/>
-      </p:nvGrpSpPr>
-      <p:grpSpPr>
-        <a:xfrm>
-          <a:off x="0" y="0"/>
-          <a:ext cx="0" cy="0"/>
-          <a:chOff x="0" y="0"/>
-          <a:chExt cx="0" cy="0"/>
-        </a:xfrm>
-      </p:grpSpPr>
-    </p:spTree>
-  </p:cSld>
-  <p:clrMapOvr>
-    <a:masterClrMapping/>
-  </p:clrMapOvr>
-</p:sld>
-</file>
-
-<file path=ppt/slides/slide61.xml><?xml version="1.0" encoding="utf-8"?>
-<p:sld xmlns:a="http://schemas.openxmlformats.org/drawingml/2006/main" xmlns:r="http://schemas.openxmlformats.org/officeDocument/2006/relationships" xmlns:p="http://schemas.openxmlformats.org/presentationml/2006/main">
-  <p:cSld>
-    <p:spTree>
-      <p:nvGrpSpPr>
-        <p:cNvPr id="1" name=""/>
-        <p:cNvGrpSpPr/>
-        <p:nvPr/>
-      </p:nvGrpSpPr>
-      <p:grpSpPr>
-        <a:xfrm>
-          <a:off x="0" y="0"/>
-          <a:ext cx="0" cy="0"/>
-          <a:chOff x="0" y="0"/>
-          <a:chExt cx="0" cy="0"/>
-        </a:xfrm>
-      </p:grpSpPr>
     </p:spTree>
   </p:cSld>
   <p:clrMapOvr>
